--- a/제안서/변동성매매펀드_AITop2_초안.pptx
+++ b/제안서/변동성매매펀드_AITop2_초안.pptx
@@ -5706,7 +5706,7 @@
         </p:nvSpPr>
         <p:spPr>
           <a:xfrm>
-            <a:off x="685800" y="1280160"/>
+            <a:off x="685800" y="1207008"/>
             <a:ext cx="8595360" cy="365760"/>
           </a:xfrm>
           <a:prstGeom prst="rect">
@@ -5746,8 +5746,8 @@
           <p:nvPr/>
         </p:nvGraphicFramePr>
         <p:xfrm>
-          <a:off x="685800" y="1783080"/>
-          <a:ext cx="4572000" cy="1920240"/>
+          <a:off x="685800" y="1645920"/>
+          <a:ext cx="4480560" cy="1737360"/>
         </p:xfrm>
         <a:graphic>
           <a:graphicData uri="http://schemas.openxmlformats.org/drawingml/2006/table">
@@ -5758,10 +5758,10 @@
               <a:tblGrid>
                 <a:gridCol w="1554480"/>
                 <a:gridCol w="1097280"/>
-                <a:gridCol w="1005840"/>
-                <a:gridCol w="914400"/>
+                <a:gridCol w="960120"/>
+                <a:gridCol w="868680"/>
               </a:tblGrid>
-              <a:tr h="384048">
+              <a:tr h="347472">
                 <a:tc>
                   <a:txBody>
                     <a:bodyPr wrap="square"/>
@@ -5769,7 +5769,7 @@
                     <a:p>
                       <a:pPr algn="ctr"/>
                       <a:r>
-                        <a:rPr sz="1100" b="1">
+                        <a:rPr sz="1050" b="1">
                           <a:solidFill>
                             <a:srgbClr val="FFFFFF"/>
                           </a:solidFill>
@@ -5792,7 +5792,7 @@
                     <a:p>
                       <a:pPr algn="ctr"/>
                       <a:r>
-                        <a:rPr sz="1100" b="1">
+                        <a:rPr sz="1050" b="1">
                           <a:solidFill>
                             <a:srgbClr val="FFFFFF"/>
                           </a:solidFill>
@@ -5815,7 +5815,7 @@
                     <a:p>
                       <a:pPr algn="ctr"/>
                       <a:r>
-                        <a:rPr sz="1100" b="1">
+                        <a:rPr sz="1050" b="1">
                           <a:solidFill>
                             <a:srgbClr val="FFFFFF"/>
                           </a:solidFill>
@@ -5838,7 +5838,7 @@
                     <a:p>
                       <a:pPr algn="ctr"/>
                       <a:r>
-                        <a:rPr sz="1100" b="1">
+                        <a:rPr sz="1050" b="1">
                           <a:solidFill>
                             <a:srgbClr val="FFFFFF"/>
                           </a:solidFill>
@@ -5855,7 +5855,7 @@
                   </a:tcPr>
                 </a:tc>
               </a:tr>
-              <a:tr h="384048">
+              <a:tr h="347472">
                 <a:tc>
                   <a:txBody>
                     <a:bodyPr wrap="square"/>
@@ -5863,7 +5863,7 @@
                     <a:p>
                       <a:pPr algn="l"/>
                       <a:r>
-                        <a:rPr sz="1100" b="1">
+                        <a:rPr sz="1050" b="1">
                           <a:solidFill>
                             <a:srgbClr val="3A3A3A"/>
                           </a:solidFill>
@@ -5886,7 +5886,7 @@
                     <a:p>
                       <a:pPr algn="ctr"/>
                       <a:r>
-                        <a:rPr sz="1100" b="0">
+                        <a:rPr sz="1050" b="0">
                           <a:solidFill>
                             <a:srgbClr val="3A3A3A"/>
                           </a:solidFill>
@@ -5909,7 +5909,7 @@
                     <a:p>
                       <a:pPr algn="ctr"/>
                       <a:r>
-                        <a:rPr sz="1100" b="0">
+                        <a:rPr sz="1050" b="0">
                           <a:solidFill>
                             <a:srgbClr val="3A3A3A"/>
                           </a:solidFill>
@@ -5932,7 +5932,7 @@
                     <a:p>
                       <a:pPr algn="ctr"/>
                       <a:r>
-                        <a:rPr sz="1100" b="0">
+                        <a:rPr sz="1050" b="0">
                           <a:solidFill>
                             <a:srgbClr val="3A3A3A"/>
                           </a:solidFill>
@@ -5949,7 +5949,7 @@
                   </a:tcPr>
                 </a:tc>
               </a:tr>
-              <a:tr h="384048">
+              <a:tr h="347472">
                 <a:tc>
                   <a:txBody>
                     <a:bodyPr wrap="square"/>
@@ -5957,7 +5957,7 @@
                     <a:p>
                       <a:pPr algn="l"/>
                       <a:r>
-                        <a:rPr sz="1100" b="1">
+                        <a:rPr sz="1050" b="1">
                           <a:solidFill>
                             <a:srgbClr val="3A3A3A"/>
                           </a:solidFill>
@@ -5980,7 +5980,7 @@
                     <a:p>
                       <a:pPr algn="ctr"/>
                       <a:r>
-                        <a:rPr sz="1100" b="0">
+                        <a:rPr sz="1050" b="0">
                           <a:solidFill>
                             <a:srgbClr val="3A3A3A"/>
                           </a:solidFill>
@@ -6003,7 +6003,7 @@
                     <a:p>
                       <a:pPr algn="ctr"/>
                       <a:r>
-                        <a:rPr sz="1100" b="0">
+                        <a:rPr sz="1050" b="0">
                           <a:solidFill>
                             <a:srgbClr val="3A3A3A"/>
                           </a:solidFill>
@@ -6026,7 +6026,7 @@
                     <a:p>
                       <a:pPr algn="ctr"/>
                       <a:r>
-                        <a:rPr sz="1100" b="0">
+                        <a:rPr sz="1050" b="0">
                           <a:solidFill>
                             <a:srgbClr val="3A3A3A"/>
                           </a:solidFill>
@@ -6043,7 +6043,7 @@
                   </a:tcPr>
                 </a:tc>
               </a:tr>
-              <a:tr h="384048">
+              <a:tr h="347472">
                 <a:tc>
                   <a:txBody>
                     <a:bodyPr wrap="square"/>
@@ -6051,7 +6051,7 @@
                     <a:p>
                       <a:pPr algn="l"/>
                       <a:r>
-                        <a:rPr sz="1100" b="1">
+                        <a:rPr sz="1050" b="1">
                           <a:solidFill>
                             <a:srgbClr val="3A3A3A"/>
                           </a:solidFill>
@@ -6074,7 +6074,7 @@
                     <a:p>
                       <a:pPr algn="ctr"/>
                       <a:r>
-                        <a:rPr sz="1100" b="0">
+                        <a:rPr sz="1050" b="0">
                           <a:solidFill>
                             <a:srgbClr val="3A3A3A"/>
                           </a:solidFill>
@@ -6097,7 +6097,7 @@
                     <a:p>
                       <a:pPr algn="ctr"/>
                       <a:r>
-                        <a:rPr sz="1100" b="0">
+                        <a:rPr sz="1050" b="0">
                           <a:solidFill>
                             <a:srgbClr val="3A3A3A"/>
                           </a:solidFill>
@@ -6120,7 +6120,7 @@
                     <a:p>
                       <a:pPr algn="ctr"/>
                       <a:r>
-                        <a:rPr sz="1100" b="0">
+                        <a:rPr sz="1050" b="0">
                           <a:solidFill>
                             <a:srgbClr val="3A3A3A"/>
                           </a:solidFill>
@@ -6137,7 +6137,7 @@
                   </a:tcPr>
                 </a:tc>
               </a:tr>
-              <a:tr h="384048">
+              <a:tr h="347472">
                 <a:tc>
                   <a:txBody>
                     <a:bodyPr wrap="square"/>
@@ -6145,7 +6145,7 @@
                     <a:p>
                       <a:pPr algn="l"/>
                       <a:r>
-                        <a:rPr sz="1100" b="1">
+                        <a:rPr sz="1050" b="1">
                           <a:solidFill>
                             <a:srgbClr val="3A3A3A"/>
                           </a:solidFill>
@@ -6168,7 +6168,7 @@
                     <a:p>
                       <a:pPr algn="ctr"/>
                       <a:r>
-                        <a:rPr sz="1100" b="0">
+                        <a:rPr sz="1050" b="0">
                           <a:solidFill>
                             <a:srgbClr val="3A3A3A"/>
                           </a:solidFill>
@@ -6191,7 +6191,7 @@
                     <a:p>
                       <a:pPr algn="ctr"/>
                       <a:r>
-                        <a:rPr sz="1100" b="0">
+                        <a:rPr sz="1050" b="0">
                           <a:solidFill>
                             <a:srgbClr val="3A3A3A"/>
                           </a:solidFill>
@@ -6214,7 +6214,7 @@
                     <a:p>
                       <a:pPr algn="ctr"/>
                       <a:r>
-                        <a:rPr sz="1100" b="0">
+                        <a:rPr sz="1050" b="0">
                           <a:solidFill>
                             <a:srgbClr val="3A3A3A"/>
                           </a:solidFill>
@@ -6243,8 +6243,8 @@
         </p:nvSpPr>
         <p:spPr>
           <a:xfrm>
-            <a:off x="685800" y="3977639"/>
-            <a:ext cx="4572000" cy="365760"/>
+            <a:off x="685800" y="3429000"/>
+            <a:ext cx="4480560" cy="320040"/>
           </a:xfrm>
           <a:prstGeom prst="rect">
             <a:avLst/>
@@ -6269,7 +6269,7 @@
                 </a:solidFill>
                 <a:latin typeface="맑은 고딕"/>
               </a:rPr>
-              <a:t>연율화 실현변동성 · 데이터: 최근 5년 주가(2021-07~2026-07)</a:t>
+              <a:t>연율화 실현변동성 · 데이터: 최근 5년 주가(2021~2026)</a:t>
             </a:r>
           </a:p>
         </p:txBody>
@@ -6282,8 +6282,8 @@
         </p:nvSpPr>
         <p:spPr>
           <a:xfrm>
-            <a:off x="5486400" y="1783080"/>
-            <a:ext cx="3703320" cy="2286000"/>
+            <a:off x="5349240" y="1645920"/>
+            <a:ext cx="3840480" cy="2103120"/>
           </a:xfrm>
           <a:prstGeom prst="rect">
             <a:avLst/>
@@ -6326,8 +6326,8 @@
         </p:nvSpPr>
         <p:spPr>
           <a:xfrm>
-            <a:off x="5715000" y="1920240"/>
-            <a:ext cx="3291840" cy="2103120"/>
+            <a:off x="5532120" y="1737360"/>
+            <a:ext cx="3520440" cy="1965960"/>
           </a:xfrm>
           <a:prstGeom prst="rect">
             <a:avLst/>
@@ -6342,154 +6342,175 @@
           <a:p>
             <a:pPr algn="l">
               <a:lnSpc>
-                <a:spcPct val="115000"/>
+                <a:spcPct val="120000"/>
               </a:lnSpc>
             </a:pPr>
             <a:r>
-              <a:rPr sz="1400" b="1">
+              <a:rPr sz="1250" b="1">
                 <a:solidFill>
                   <a:srgbClr val="043B72"/>
                 </a:solidFill>
                 <a:latin typeface="맑은 고딕"/>
               </a:rPr>
-              <a:t>방향성도 강화되고 있다</a:t>
+              <a:t>변동성을 키운 구조적 원인: 단일종목 레버리지 ETF</a:t>
             </a:r>
           </a:p>
           <a:p>
             <a:pPr algn="l">
               <a:lnSpc>
-                <a:spcPct val="115000"/>
+                <a:spcPct val="120000"/>
               </a:lnSpc>
             </a:pPr>
             <a:r>
-              <a:rPr sz="1150" b="0">
+              <a:rPr sz="1050" b="0">
                 <a:solidFill>
                   <a:srgbClr val="3A3A3A"/>
                 </a:solidFill>
                 <a:latin typeface="맑은 고딕"/>
               </a:rPr>
-              <a:t>삼성전자·SK하이닉스 </a:t>
-            </a:r>
-            <a:r>
-              <a:rPr sz="1150" b="1">
+              <a:t>삼성전자·SK하이닉스 단일종목 레버리지 ETF 급증 </a:t>
+            </a:r>
+            <a:r>
+              <a:rPr sz="1050" b="1">
                 <a:solidFill>
                   <a:srgbClr val="F58220"/>
                 </a:solidFill>
                 <a:latin typeface="맑은 고딕"/>
               </a:rPr>
-              <a:t>단일종목 레버리지 ETF</a:t>
-            </a:r>
-            <a:r>
-              <a:rPr sz="1150" b="0">
+              <a:t>(합산 AUM 13.1조원)</a:t>
+            </a:r>
+          </a:p>
+          <a:p>
+            <a:pPr algn="l">
+              <a:lnSpc>
+                <a:spcPct val="120000"/>
+              </a:lnSpc>
+            </a:pPr>
+            <a:r>
+              <a:rPr sz="1050" b="0">
                 <a:solidFill>
                   <a:srgbClr val="3A3A3A"/>
                 </a:solidFill>
                 <a:latin typeface="맑은 고딕"/>
               </a:rPr>
-              <a:t> 가 </a:t>
-            </a:r>
-            <a:r>
-              <a:rPr sz="1150" b="1">
-                <a:solidFill>
-                  <a:srgbClr val="3A3A3A"/>
+              <a:t>두 종목이 KOSPI200의 </a:t>
+            </a:r>
+            <a:r>
+              <a:rPr sz="1050" b="1">
+                <a:solidFill>
+                  <a:srgbClr val="F58220"/>
                 </a:solidFill>
                 <a:latin typeface="맑은 고딕"/>
               </a:rPr>
-              <a:t>2026-05-27 일제히 상장</a:t>
+              <a:t>51.5%</a:t>
+            </a:r>
+            <a:r>
+              <a:rPr sz="1050" b="0">
+                <a:solidFill>
+                  <a:srgbClr val="3A3A3A"/>
+                </a:solidFill>
+                <a:latin typeface="맑은 고딕"/>
+              </a:rPr>
+              <a:t> (연초 38.7%→5월)</a:t>
             </a:r>
           </a:p>
           <a:p>
             <a:pPr algn="l">
               <a:lnSpc>
-                <a:spcPct val="115000"/>
+                <a:spcPct val="120000"/>
               </a:lnSpc>
             </a:pPr>
             <a:r>
-              <a:rPr sz="1150" b="0">
+              <a:rPr sz="1050" b="0">
                 <a:solidFill>
                   <a:srgbClr val="3A3A3A"/>
                 </a:solidFill>
                 <a:latin typeface="맑은 고딕"/>
               </a:rPr>
-              <a:t>상장 6주 만에 순자산 급증:</a:t>
+              <a:t>2배 상품이 오른 날 더 사고 내린 날 더 파는 </a:t>
+            </a:r>
+            <a:r>
+              <a:rPr sz="1050" b="1">
+                <a:solidFill>
+                  <a:srgbClr val="043B72"/>
+                </a:solidFill>
+                <a:latin typeface="맑은 고딕"/>
+              </a:rPr>
+              <a:t>종가 순응매매(+10%일 2.6조)</a:t>
             </a:r>
           </a:p>
           <a:p>
             <a:pPr algn="l">
               <a:lnSpc>
-                <a:spcPct val="115000"/>
+                <a:spcPct val="120000"/>
               </a:lnSpc>
             </a:pPr>
             <a:r>
               <a:rPr sz="1100" b="1">
                 <a:solidFill>
-                  <a:srgbClr val="043B72"/>
+                  <a:srgbClr val="F58220"/>
                 </a:solidFill>
                 <a:latin typeface="맑은 고딕"/>
               </a:rPr>
-              <a:t>· KODEX SK하이닉스레버리지  4.35조원</a:t>
-            </a:r>
-          </a:p>
-          <a:p>
-            <a:pPr algn="l">
-              <a:lnSpc>
-                <a:spcPct val="115000"/>
-              </a:lnSpc>
-            </a:pPr>
-            <a:r>
-              <a:rPr sz="1100" b="1">
-                <a:solidFill>
-                  <a:srgbClr val="043B72"/>
-                </a:solidFill>
-                <a:latin typeface="맑은 고딕"/>
-              </a:rPr>
-              <a:t>· KODEX 삼성전자레버리지  2.77조원</a:t>
-            </a:r>
-          </a:p>
-          <a:p>
-            <a:pPr algn="l">
-              <a:lnSpc>
-                <a:spcPct val="115000"/>
-              </a:lnSpc>
-            </a:pPr>
-            <a:r>
-              <a:rPr sz="1150" b="1">
-                <a:solidFill>
-                  <a:srgbClr val="F58220"/>
-                </a:solidFill>
-                <a:latin typeface="맑은 고딕"/>
-              </a:rPr>
-              <a:t>· 2종목 레버리지 ETF 합계 10조원 이상</a:t>
-            </a:r>
-          </a:p>
-          <a:p>
-            <a:pPr algn="l">
-              <a:lnSpc>
-                <a:spcPct val="115000"/>
-              </a:lnSpc>
-            </a:pPr>
-            <a:r>
-              <a:rPr sz="1150" b="1">
-                <a:solidFill>
-                  <a:srgbClr val="3A3A3A"/>
-                </a:solidFill>
-                <a:latin typeface="맑은 고딕"/>
-              </a:rPr>
-              <a:t>→ 시장의 강한 상승 방향성 베팅</a:t>
-            </a:r>
-          </a:p>
-        </p:txBody>
-      </p:sp>
-      <p:sp>
-        <p:nvSpPr>
-          <p:cNvPr id="11" name="TextBox 10"/>
+              <a:t>→ 변동성이 변동성을 부르는 되먹임</a:t>
+            </a:r>
+          </a:p>
+        </p:txBody>
+      </p:sp>
+      <p:sp>
+        <p:nvSpPr>
+          <p:cNvPr id="11" name="Rectangle 10"/>
+          <p:cNvSpPr/>
+          <p:nvPr/>
+        </p:nvSpPr>
+        <p:spPr>
+          <a:xfrm>
+            <a:off x="685800" y="3977639"/>
+            <a:ext cx="8503920" cy="2103120"/>
+          </a:xfrm>
+          <a:prstGeom prst="rect">
+            <a:avLst/>
+          </a:prstGeom>
+          <a:solidFill>
+            <a:srgbClr val="F2F5F8"/>
+          </a:solidFill>
+          <a:ln>
+            <a:noFill/>
+          </a:ln>
+          <a:effectLst/>
+        </p:spPr>
+        <p:style>
+          <a:lnRef idx="1">
+            <a:schemeClr val="accent1"/>
+          </a:lnRef>
+          <a:fillRef idx="3">
+            <a:schemeClr val="accent1"/>
+          </a:fillRef>
+          <a:effectRef idx="2">
+            <a:schemeClr val="accent1"/>
+          </a:effectRef>
+          <a:fontRef idx="minor">
+            <a:schemeClr val="lt1"/>
+          </a:fontRef>
+        </p:style>
+        <p:txBody>
+          <a:bodyPr rtlCol="0" anchor="ctr"/>
+          <a:lstStyle/>
+          <a:p>
+            <a:pPr algn="ctr"/>
+          </a:p>
+        </p:txBody>
+      </p:sp>
+      <p:sp>
+        <p:nvSpPr>
+          <p:cNvPr id="12" name="TextBox 11"/>
           <p:cNvSpPr txBox="1"/>
           <p:nvPr/>
         </p:nvSpPr>
         <p:spPr>
           <a:xfrm>
-            <a:off x="685800" y="4480560"/>
-            <a:ext cx="8503920" cy="1645920"/>
+            <a:off x="868680" y="4114800"/>
+            <a:ext cx="8138160" cy="365760"/>
           </a:xfrm>
           <a:prstGeom prst="rect">
             <a:avLst/>
@@ -6497,6 +6518,45 @@
           <a:noFill/>
         </p:spPr>
         <p:txBody>
+          <a:bodyPr wrap="square" lIns="25400" rIns="25400" tIns="12700" bIns="12700" anchor="t">
+            <a:spAutoFit/>
+          </a:bodyPr>
+          <a:lstStyle/>
+          <a:p>
+            <a:pPr algn="l">
+              <a:lnSpc>
+                <a:spcPct val="100000"/>
+              </a:lnSpc>
+            </a:pPr>
+            <a:r>
+              <a:rPr sz="1400" b="1">
+                <a:solidFill>
+                  <a:srgbClr val="043B72"/>
+                </a:solidFill>
+                <a:latin typeface="맑은 고딕"/>
+              </a:rPr>
+              <a:t>레버리지 ETF가 '잃는' 변동성을, 본 전략은 '수취'한다</a:t>
+            </a:r>
+          </a:p>
+        </p:txBody>
+      </p:sp>
+      <p:sp>
+        <p:nvSpPr>
+          <p:cNvPr id="13" name="TextBox 12"/>
+          <p:cNvSpPr txBox="1"/>
+          <p:nvPr/>
+        </p:nvSpPr>
+        <p:spPr>
+          <a:xfrm>
+            <a:off x="868680" y="4572000"/>
+            <a:ext cx="8138160" cy="1463040"/>
+          </a:xfrm>
+          <a:prstGeom prst="rect">
+            <a:avLst/>
+          </a:prstGeom>
+          <a:noFill/>
+        </p:spPr>
+        <p:txBody>
           <a:bodyPr wrap="square">
             <a:spAutoFit/>
           </a:bodyPr>
@@ -6504,46 +6564,65 @@
           <a:p>
             <a:pPr>
               <a:lnSpc>
-                <a:spcPct val="130000"/>
+                <a:spcPct val="125000"/>
               </a:lnSpc>
               <a:spcAft>
                 <a:spcPts val="300"/>
               </a:spcAft>
             </a:pPr>
             <a:r>
-              <a:rPr sz="1250" b="1">
-                <a:solidFill>
-                  <a:srgbClr val="043B72"/>
+              <a:rPr sz="1150" b="0">
+                <a:solidFill>
+                  <a:srgbClr val="D02F00"/>
                 </a:solidFill>
                 <a:latin typeface="맑은 고딕"/>
               </a:rPr>
-              <a:t>▶ 변동성 확대 = 옵션 프리미엄 확대 → 변동성 매도(프리미엄 수취) 전략의 기대수익 극대화 구간</a:t>
+              <a:t>▶ 레버리지 ETF: 고가매수·저가매도로 변동성 잠식(Volatility Decay) — 실제 KODEX SK하이닉스레버리지는 7월 5거래일 만에 −20.3%(기초 −3.2% 제자리)</a:t>
             </a:r>
           </a:p>
           <a:p>
             <a:pPr>
               <a:lnSpc>
-                <a:spcPct val="130000"/>
+                <a:spcPct val="125000"/>
               </a:lnSpc>
               <a:spcAft>
                 <a:spcPts val="300"/>
               </a:spcAft>
             </a:pPr>
             <a:r>
-              <a:rPr sz="1250" b="0">
-                <a:solidFill>
-                  <a:srgbClr val="3A3A3A"/>
+              <a:rPr sz="1150" b="1">
+                <a:solidFill>
+                  <a:srgbClr val="043B72"/>
                 </a:solidFill>
                 <a:latin typeface="맑은 고딕"/>
               </a:rPr>
-              <a:t>▶ 레버리지 ETF 자금 유입은 상방 방향성을 강화 → 변동성 매도 + 상승 참여를 결합할 근거</a:t>
-            </a:r>
-          </a:p>
-        </p:txBody>
-      </p:sp>
-      <p:sp>
-        <p:nvSpPr>
-          <p:cNvPr id="12" name="TextBox 11"/>
+              <a:t>▶ 본 전략(변동성 매도 복제): 주가↓ 비중↑(저가매수)·주가↑ 비중↓(고가매도) — 확대된 변동성을 프리미엄으로 수취</a:t>
+            </a:r>
+          </a:p>
+          <a:p>
+            <a:pPr>
+              <a:lnSpc>
+                <a:spcPct val="125000"/>
+              </a:lnSpc>
+              <a:spcAft>
+                <a:spcPts val="300"/>
+              </a:spcAft>
+            </a:pPr>
+            <a:r>
+              <a:rPr sz="1150" b="0">
+                <a:solidFill>
+                  <a:srgbClr val="3A3A3A"/>
+                </a:solidFill>
+                <a:latin typeface="맑은 고딕"/>
+              </a:rPr>
+              <a:t>▶ 변동성 확대 = 옵션 프리미엄 확대 → 변동성 매도 전략의 기대수익 극대화 구간</a:t>
+            </a:r>
+          </a:p>
+        </p:txBody>
+      </p:sp>
+      <p:sp>
+        <p:nvSpPr>
+          <p:cNvPr id="14" name="TextBox 13"/>
           <p:cNvSpPr txBox="1"/>
           <p:nvPr/>
         </p:nvSpPr>
@@ -6582,7 +6661,7 @@
       </p:sp>
       <p:sp>
         <p:nvSpPr>
-          <p:cNvPr id="13" name="TextBox 12"/>
+          <p:cNvPr id="15" name="TextBox 14"/>
           <p:cNvSpPr txBox="1"/>
           <p:nvPr/>
         </p:nvSpPr>
@@ -7335,7 +7414,7 @@
                 </a:solidFill>
                 <a:latin typeface="맑은 고딕"/>
               </a:rPr>
-              <a:t>단일종목 레버리지 ETF 상장·자금유입으로 상방 수급 강화. 급락 시에도 저가매수 유입 기대.</a:t>
+              <a:t>단일종목 레버리지 ETF 13.1조 유입 + 오른 날 더 사는 종가 순응매매로 상방 모멘텀 강화. 두 종목이 KOSPI200의 51.5%.</a:t>
             </a:r>
           </a:p>
         </p:txBody>
